--- a/Paper/MEA 2026 Presntation.pptx
+++ b/Paper/MEA 2026 Presntation.pptx
@@ -248,7 +248,7 @@
           <a:p>
             <a:fld id="{211A00E0-8A82-468F-9B2B-F8EB4AB6399D}" type="datetimeFigureOut">
               <a:rPr lang="en-US" smtClean="0"/>
-              <a:t>3/19/2026</a:t>
+              <a:t>3/20/2026</a:t>
             </a:fld>
             <a:endParaRPr lang="en-US"/>
           </a:p>
@@ -413,7 +413,7 @@
           <a:p>
             <a:fld id="{6A2F7AD5-1E06-481F-9C05-C3A40CB42C63}" type="datetimeFigureOut">
               <a:rPr lang="en-US" smtClean="0"/>
-              <a:t>3/19/2026</a:t>
+              <a:t>3/20/2026</a:t>
             </a:fld>
             <a:endParaRPr lang="en-US"/>
           </a:p>
@@ -1102,7 +1102,7 @@
           <a:p>
             <a:fld id="{176A6A54-2A6B-4242-B691-C4DE4231F394}" type="datetimeFigureOut">
               <a:rPr lang="en-US" smtClean="0"/>
-              <a:t>3/19/2026</a:t>
+              <a:t>3/20/2026</a:t>
             </a:fld>
             <a:endParaRPr lang="en-US"/>
           </a:p>
@@ -1288,7 +1288,7 @@
           <a:p>
             <a:fld id="{176A6A54-2A6B-4242-B691-C4DE4231F394}" type="datetimeFigureOut">
               <a:rPr lang="en-US" smtClean="0"/>
-              <a:t>3/19/2026</a:t>
+              <a:t>3/20/2026</a:t>
             </a:fld>
             <a:endParaRPr lang="en-US"/>
           </a:p>
@@ -1569,7 +1569,7 @@
           <a:p>
             <a:fld id="{176A6A54-2A6B-4242-B691-C4DE4231F394}" type="datetimeFigureOut">
               <a:rPr lang="en-US" smtClean="0"/>
-              <a:t>3/19/2026</a:t>
+              <a:t>3/20/2026</a:t>
             </a:fld>
             <a:endParaRPr lang="en-US"/>
           </a:p>
@@ -1835,7 +1835,7 @@
           <a:p>
             <a:fld id="{176A6A54-2A6B-4242-B691-C4DE4231F394}" type="datetimeFigureOut">
               <a:rPr lang="en-US" smtClean="0"/>
-              <a:t>3/19/2026</a:t>
+              <a:t>3/20/2026</a:t>
             </a:fld>
             <a:endParaRPr lang="en-US"/>
           </a:p>
@@ -2433,7 +2433,7 @@
           <a:p>
             <a:fld id="{176A6A54-2A6B-4242-B691-C4DE4231F394}" type="datetimeFigureOut">
               <a:rPr lang="en-US" smtClean="0"/>
-              <a:t>3/19/2026</a:t>
+              <a:t>3/20/2026</a:t>
             </a:fld>
             <a:endParaRPr lang="en-US"/>
           </a:p>
@@ -2531,7 +2531,7 @@
           <a:p>
             <a:fld id="{176A6A54-2A6B-4242-B691-C4DE4231F394}" type="datetimeFigureOut">
               <a:rPr lang="en-US" smtClean="0"/>
-              <a:t>3/19/2026</a:t>
+              <a:t>3/20/2026</a:t>
             </a:fld>
             <a:endParaRPr lang="en-US"/>
           </a:p>
@@ -2634,7 +2634,7 @@
           <a:p>
             <a:fld id="{176A6A54-2A6B-4242-B691-C4DE4231F394}" type="datetimeFigureOut">
               <a:rPr lang="en-US" smtClean="0"/>
-              <a:t>3/19/2026</a:t>
+              <a:t>3/20/2026</a:t>
             </a:fld>
             <a:endParaRPr lang="en-US"/>
           </a:p>
@@ -2943,7 +2943,7 @@
             <a:fld id="{176A6A54-2A6B-4242-B691-C4DE4231F394}" type="datetimeFigureOut">
               <a:rPr lang="en-US" smtClean="0"/>
               <a:pPr/>
-              <a:t>3/19/2026</a:t>
+              <a:t>3/20/2026</a:t>
             </a:fld>
             <a:endParaRPr lang="en-US"/>
           </a:p>
@@ -3317,15 +3317,30 @@
             <p:ph type="ctrTitle"/>
           </p:nvPr>
         </p:nvSpPr>
-        <p:spPr/>
-        <p:txBody>
-          <a:bodyPr/>
+        <p:spPr>
+          <a:xfrm>
+            <a:off x="812800" y="3733800"/>
+            <a:ext cx="10566400" cy="1219200"/>
+          </a:xfrm>
+        </p:spPr>
+        <p:txBody>
+          <a:bodyPr anchor="t">
+            <a:normAutofit/>
+          </a:bodyPr>
           <a:lstStyle/>
           <a:p>
             <a:r>
               <a:rPr lang="en-US" dirty="0"/>
               <a:t>Corporate Ownership on Housing Values</a:t>
             </a:r>
+            <a:br>
+              <a:rPr lang="en-US" dirty="0"/>
+            </a:br>
+            <a:r>
+              <a:rPr lang="en-US" sz="2400" dirty="0"/>
+              <a:t>(paper still trying to get out of bed)</a:t>
+            </a:r>
+            <a:endParaRPr lang="en-US" dirty="0"/>
           </a:p>
         </p:txBody>
       </p:sp>
